--- a/media/exports/reports/2026-02/people-helped.pptx
+++ b/media/exports/reports/2026-02/people-helped.pptx
@@ -182,16 +182,16 @@
               <c:strCache>
                 <c:ptCount val="4"/>
                 <c:pt idx="0">
-                  <c:v>Digital literacy</c:v>
+                  <c:v>Community meals</c:v>
                 </c:pt>
                 <c:pt idx="1">
                   <c:v>Youth outreach</c:v>
                 </c:pt>
                 <c:pt idx="2">
-                  <c:v>Community meals</c:v>
+                  <c:v>Housing support</c:v>
                 </c:pt>
                 <c:pt idx="3">
-                  <c:v>Housing support</c:v>
+                  <c:v>Digital literacy</c:v>
                 </c:pt>
               </c:strCache>
             </c:strRef>
@@ -203,16 +203,16 @@
                 <c:formatCode>0.0"%";[Red](0.0"%")</c:formatCode>
                 <c:ptCount val="4"/>
                 <c:pt idx="0">
-                  <c:v>87.7</c:v>
+                  <c:v>89.8</c:v>
                 </c:pt>
                 <c:pt idx="1">
                   <c:v>90.3</c:v>
                 </c:pt>
                 <c:pt idx="2">
-                  <c:v>91.0</c:v>
+                  <c:v>90.5</c:v>
                 </c:pt>
                 <c:pt idx="3">
-                  <c:v>91.5</c:v>
+                  <c:v>90.5</c:v>
                 </c:pt>
               </c:numCache>
             </c:numRef>
@@ -276,7 +276,7 @@
       <c:valAx>
         <c:axId val="-2113994440"/>
         <c:scaling>
-          <c:max val="105.225"/>
+          <c:max val="104.07499999999999"/>
           <c:min val="0.0"/>
         </c:scaling>
         <c:delete/>
@@ -1043,7 +1043,7 @@
           <a:lstStyle/>
           <a:p>
             <a:r>
-              <a:t>How many people did we help this month, and how many couldn't we reach?. People helped, February: 396; Couldn't reach, February: 42; Share reached, February: 90.4%. 396 people were helped in February, and 42 came to a program but couldn't be helped: 90.4% reached (target 90.0%), against 86.1% in January. Digital literacy reached the smallest share: 87.7% (8 couldn't be helped). The main reason: program at capacity (19 people).</a:t>
+              <a:t>How many people did we help this month, and how many couldn't we reach?. People helped, February: 396; Couldn't reach, February: 43; Share reached, February: 90.2%. 396 people were helped in February, and 43 came to a program but couldn't be helped: 90.2% reached (target 90.0%), against 89.7% in January. Community meals reached the smallest share: 89.8% (16 couldn't be helped). The main reason: program at capacity (19 people).</a:t>
             </a:r>
           </a:p>
         </p:txBody>
@@ -4598,7 +4598,7 @@
                 </a:solidFill>
                 <a:latin typeface="Roboto"/>
               </a:rPr>
-              <a:t>Data retrieved 2pm, Tue 6 Oct 2026 · Generated 8 Oct 2026, 6:29pm · Sample data · Made with Python (python-pptx)</a:t>
+              <a:t>Data retrieved 2pm, Tue 6 Oct 2026 · Generated 8 Oct 2026, 11:41pm · Sample data · Made with Python (python-pptx)</a:t>
             </a:r>
           </a:p>
         </p:txBody>
@@ -5110,7 +5110,7 @@
                 </a:solidFill>
                 <a:latin typeface="Roboto"/>
               </a:rPr>
-              <a:t>42</a:t>
+              <a:t>43</a:t>
             </a:r>
           </a:p>
         </p:txBody>
@@ -5149,7 +5149,7 @@
                 </a:solidFill>
                 <a:latin typeface="Roboto"/>
               </a:rPr>
-              <a:t>January 69</a:t>
+              <a:t>January 49</a:t>
             </a:r>
           </a:p>
         </p:txBody>
@@ -5276,7 +5276,7 @@
                 </a:solidFill>
                 <a:latin typeface="Roboto"/>
               </a:rPr>
-              <a:t>90.4%</a:t>
+              <a:t>90.2%</a:t>
             </a:r>
           </a:p>
         </p:txBody>
@@ -5346,7 +5346,7 @@
         </p:nvCxnSpPr>
         <p:spPr>
           <a:xfrm>
-            <a:off x="9434827" y="2611587"/>
+            <a:off x="9496644" y="2611587"/>
             <a:ext cx="0" cy="1995586"/>
           </a:xfrm>
           <a:prstGeom prst="line">
@@ -5382,7 +5382,7 @@
         </p:nvSpPr>
         <p:spPr>
           <a:xfrm>
-            <a:off x="8337547" y="4607173"/>
+            <a:off x="8399364" y="4607173"/>
             <a:ext cx="2194560" cy="237744"/>
           </a:xfrm>
           <a:prstGeom prst="rect">
@@ -5535,7 +5535,7 @@
                 </a:solidFill>
                 <a:latin typeface="Roboto"/>
               </a:rPr>
-              <a:t>396 people were helped in February, and 42 came to a program but couldn't be helped: 90.4% reached (target 90.0%), against 86.1% in January.</a:t>
+              <a:t>396 people were helped in February, and 43 came to a program but couldn't be helped: 90.2% reached (target 90.0%), against 89.7% in January.</a:t>
             </a:r>
           </a:p>
         </p:txBody>
@@ -5662,7 +5662,7 @@
                 </a:solidFill>
                 <a:latin typeface="Roboto"/>
               </a:rPr>
-              <a:t>Digital literacy reached the smallest share: 87.7% (8 couldn't be helped). The main reason: program at capacity (19 people).</a:t>
+              <a:t>Community meals reached the smallest share: 89.8% (16 couldn't be helped). The main reason: program at capacity (19 people).</a:t>
             </a:r>
           </a:p>
         </p:txBody>
@@ -5740,7 +5740,7 @@
                 </a:solidFill>
                 <a:latin typeface="Roboto"/>
               </a:rPr>
-              <a:t>Data retrieved 2pm, Tue 6 Oct 2026 · Generated 8 Oct 2026, 6:29pm · Sample data · Made with Python (python-pptx)</a:t>
+              <a:t>Data retrieved 2pm, Tue 6 Oct 2026 · Generated 8 Oct 2026, 11:41pm · Sample data · Made with Python (python-pptx)</a:t>
             </a:r>
           </a:p>
         </p:txBody>
@@ -6055,7 +6055,7 @@
                 </a:solidFill>
                 <a:latin typeface="Roboto"/>
               </a:rPr>
-              <a:t>Data retrieved 2pm, Tue 6 Oct 2026 · Generated 8 Oct 2026, 6:29pm · Sample data · Made with Python (python-pptx)</a:t>
+              <a:t>Data retrieved 2pm, Tue 6 Oct 2026 · Generated 8 Oct 2026, 11:41pm · Sample data · Made with Python (python-pptx)</a:t>
             </a:r>
           </a:p>
         </p:txBody>
@@ -6419,7 +6419,119 @@
                           </a:solidFill>
                           <a:latin typeface="Roboto"/>
                         </a:rPr>
-                        <a:t>15</a:t>
+                        <a:t>8</a:t>
+                      </a:r>
+                    </a:p>
+                  </a:txBody>
+                  <a:tcPr>
+                    <a:solidFill>
+                      <a:srgbClr val="F7FAF7"/>
+                    </a:solidFill>
+                  </a:tcPr>
+                </a:tc>
+              </a:tr>
+              <a:tr h="310896">
+                <a:tc>
+                  <a:txBody>
+                    <a:bodyPr/>
+                    <a:lstStyle/>
+                    <a:p>
+                      <a:pPr algn="l">
+                        <a:defRPr>
+                          <a:latin typeface="Roboto"/>
+                        </a:defRPr>
+                      </a:pPr>
+                      <a:r>
+                        <a:rPr sz="1050">
+                          <a:solidFill>
+                            <a:srgbClr val="25342A"/>
+                          </a:solidFill>
+                          <a:latin typeface="Roboto"/>
+                        </a:rPr>
+                        <a:t>Couldn't make contact</a:t>
+                      </a:r>
+                    </a:p>
+                  </a:txBody>
+                  <a:tcPr>
+                    <a:solidFill>
+                      <a:srgbClr val="FFFFFF"/>
+                    </a:solidFill>
+                  </a:tcPr>
+                </a:tc>
+                <a:tc>
+                  <a:txBody>
+                    <a:bodyPr/>
+                    <a:lstStyle/>
+                    <a:p>
+                      <a:pPr algn="r">
+                        <a:defRPr>
+                          <a:latin typeface="Roboto"/>
+                        </a:defRPr>
+                      </a:pPr>
+                      <a:r>
+                        <a:rPr sz="1050">
+                          <a:solidFill>
+                            <a:srgbClr val="25342A"/>
+                          </a:solidFill>
+                          <a:latin typeface="Roboto"/>
+                        </a:rPr>
+                        <a:t>7</a:t>
+                      </a:r>
+                    </a:p>
+                  </a:txBody>
+                  <a:tcPr>
+                    <a:solidFill>
+                      <a:srgbClr val="FFFFFF"/>
+                    </a:solidFill>
+                  </a:tcPr>
+                </a:tc>
+              </a:tr>
+              <a:tr h="310896">
+                <a:tc>
+                  <a:txBody>
+                    <a:bodyPr/>
+                    <a:lstStyle/>
+                    <a:p>
+                      <a:pPr algn="l">
+                        <a:defRPr>
+                          <a:latin typeface="Roboto"/>
+                        </a:defRPr>
+                      </a:pPr>
+                      <a:r>
+                        <a:rPr sz="1050">
+                          <a:solidFill>
+                            <a:srgbClr val="25342A"/>
+                          </a:solidFill>
+                          <a:latin typeface="Roboto"/>
+                        </a:rPr>
+                        <a:t>Not eligible</a:t>
+                      </a:r>
+                    </a:p>
+                  </a:txBody>
+                  <a:tcPr>
+                    <a:solidFill>
+                      <a:srgbClr val="F7FAF7"/>
+                    </a:solidFill>
+                  </a:tcPr>
+                </a:tc>
+                <a:tc>
+                  <a:txBody>
+                    <a:bodyPr/>
+                    <a:lstStyle/>
+                    <a:p>
+                      <a:pPr algn="r">
+                        <a:defRPr>
+                          <a:latin typeface="Roboto"/>
+                        </a:defRPr>
+                      </a:pPr>
+                      <a:r>
+                        <a:rPr sz="1050">
+                          <a:solidFill>
+                            <a:srgbClr val="25342A"/>
+                          </a:solidFill>
+                          <a:latin typeface="Roboto"/>
+                        </a:rPr>
+                        <a:t>6</a:t>
                       </a:r>
                     </a:p>
                   </a:txBody>
@@ -6475,119 +6587,7 @@
                           </a:solidFill>
                           <a:latin typeface="Roboto"/>
                         </a:rPr>
-                        <a:t>4</a:t>
-                      </a:r>
-                    </a:p>
-                  </a:txBody>
-                  <a:tcPr>
-                    <a:solidFill>
-                      <a:srgbClr val="FFFFFF"/>
-                    </a:solidFill>
-                  </a:tcPr>
-                </a:tc>
-              </a:tr>
-              <a:tr h="310896">
-                <a:tc>
-                  <a:txBody>
-                    <a:bodyPr/>
-                    <a:lstStyle/>
-                    <a:p>
-                      <a:pPr algn="l">
-                        <a:defRPr>
-                          <a:latin typeface="Roboto"/>
-                        </a:defRPr>
-                      </a:pPr>
-                      <a:r>
-                        <a:rPr sz="1050">
-                          <a:solidFill>
-                            <a:srgbClr val="25342A"/>
-                          </a:solidFill>
-                          <a:latin typeface="Roboto"/>
-                        </a:rPr>
-                        <a:t>Couldn't make contact</a:t>
-                      </a:r>
-                    </a:p>
-                  </a:txBody>
-                  <a:tcPr>
-                    <a:solidFill>
-                      <a:srgbClr val="F7FAF7"/>
-                    </a:solidFill>
-                  </a:tcPr>
-                </a:tc>
-                <a:tc>
-                  <a:txBody>
-                    <a:bodyPr/>
-                    <a:lstStyle/>
-                    <a:p>
-                      <a:pPr algn="r">
-                        <a:defRPr>
-                          <a:latin typeface="Roboto"/>
-                        </a:defRPr>
-                      </a:pPr>
-                      <a:r>
-                        <a:rPr sz="1050">
-                          <a:solidFill>
-                            <a:srgbClr val="25342A"/>
-                          </a:solidFill>
-                          <a:latin typeface="Roboto"/>
-                        </a:rPr>
                         <a:t>3</a:t>
-                      </a:r>
-                    </a:p>
-                  </a:txBody>
-                  <a:tcPr>
-                    <a:solidFill>
-                      <a:srgbClr val="F7FAF7"/>
-                    </a:solidFill>
-                  </a:tcPr>
-                </a:tc>
-              </a:tr>
-              <a:tr h="310896">
-                <a:tc>
-                  <a:txBody>
-                    <a:bodyPr/>
-                    <a:lstStyle/>
-                    <a:p>
-                      <a:pPr algn="l">
-                        <a:defRPr>
-                          <a:latin typeface="Roboto"/>
-                        </a:defRPr>
-                      </a:pPr>
-                      <a:r>
-                        <a:rPr sz="1050">
-                          <a:solidFill>
-                            <a:srgbClr val="25342A"/>
-                          </a:solidFill>
-                          <a:latin typeface="Roboto"/>
-                        </a:rPr>
-                        <a:t>Not eligible</a:t>
-                      </a:r>
-                    </a:p>
-                  </a:txBody>
-                  <a:tcPr>
-                    <a:solidFill>
-                      <a:srgbClr val="FFFFFF"/>
-                    </a:solidFill>
-                  </a:tcPr>
-                </a:tc>
-                <a:tc>
-                  <a:txBody>
-                    <a:bodyPr/>
-                    <a:lstStyle/>
-                    <a:p>
-                      <a:pPr algn="r">
-                        <a:defRPr>
-                          <a:latin typeface="Roboto"/>
-                        </a:defRPr>
-                      </a:pPr>
-                      <a:r>
-                        <a:rPr sz="1050">
-                          <a:solidFill>
-                            <a:srgbClr val="25342A"/>
-                          </a:solidFill>
-                          <a:latin typeface="Roboto"/>
-                        </a:rPr>
-                        <a:t>1</a:t>
                       </a:r>
                     </a:p>
                   </a:txBody>
@@ -6675,7 +6675,7 @@
                 </a:solidFill>
                 <a:latin typeface="Roboto"/>
               </a:rPr>
-              <a:t>Data retrieved 2pm, Tue 6 Oct 2026 · Generated 8 Oct 2026, 6:29pm · Sample data · Made with Python (python-pptx)</a:t>
+              <a:t>Data retrieved 2pm, Tue 6 Oct 2026 · Generated 8 Oct 2026, 11:41pm · Sample data · Made with Python (python-pptx)</a:t>
             </a:r>
           </a:p>
         </p:txBody>

--- a/media/exports/reports/2026-02/people-helped.pptx
+++ b/media/exports/reports/2026-02/people-helped.pptx
@@ -973,7 +973,7 @@
           <a:lstStyle/>
           <a:p>
             <a:r>
-              <a:t>How many people did we help this month, and how many couldn't we reach?. Sample Community Services Ltd. Period: February 2026. People helped by each program, day by day, and the people who came to a program but couldn't be helped (and why). People helped are counted against each program's own grant spend.</a:t>
+              <a:t>How many people did we help this month, and how many couldn't we reach?. Sample Community Services Ltd. Period: February 2026. In short: 396 people helped in February; 43 couldn't be reached (90.2% reached, target 90.0%). People helped by each program, day by day, and the people who came to a program but couldn't be helped (and why). People helped are counted against each program's own grant spend.</a:t>
             </a:r>
           </a:p>
         </p:txBody>
@@ -4408,7 +4408,7 @@
         <p:spPr>
           <a:xfrm>
             <a:off x="457200" y="3703320"/>
-            <a:ext cx="11277295" cy="535940"/>
+            <a:ext cx="11277295" cy="758190"/>
           </a:xfrm>
           <a:prstGeom prst="rect">
             <a:avLst/>
@@ -4433,7 +4433,7 @@
                 </a:solidFill>
                 <a:latin typeface="Roboto"/>
               </a:rPr>
-              <a:t>Period: February 2026. People helped by each program, day by day, and the people who came to a program but couldn't be helped (and why). People helped are counted against each program's own grant spend.</a:t>
+              <a:t>Period: February 2026. In short: 396 people helped in February; 43 couldn't be reached (90.2% reached, target 90.0%). People helped by each program, day by day, and the people who came to a program but couldn't be helped (and why). People helped are counted against each program's own grant spend.</a:t>
             </a:r>
           </a:p>
         </p:txBody>
@@ -4446,7 +4446,7 @@
         </p:nvSpPr>
         <p:spPr>
           <a:xfrm>
-            <a:off x="457200" y="4330700"/>
+            <a:off x="457200" y="4552950"/>
             <a:ext cx="11277295" cy="1097280"/>
           </a:xfrm>
           <a:prstGeom prst="rect">
@@ -4598,7 +4598,7 @@
                 </a:solidFill>
                 <a:latin typeface="Roboto"/>
               </a:rPr>
-              <a:t>Data retrieved 2pm, Tue 6 Oct 2026 · Generated 8 Oct 2026, 11:41pm · Sample data · Made with Python (python-pptx)</a:t>
+              <a:t>Data retrieved 2pm, Tue 6 Oct 2026 · Generated 10 Oct 2026, 9:55pm · Sample data · Made with Python (python-pptx)</a:t>
             </a:r>
           </a:p>
         </p:txBody>
@@ -5740,7 +5740,7 @@
                 </a:solidFill>
                 <a:latin typeface="Roboto"/>
               </a:rPr>
-              <a:t>Data retrieved 2pm, Tue 6 Oct 2026 · Generated 8 Oct 2026, 11:41pm · Sample data · Made with Python (python-pptx)</a:t>
+              <a:t>Data retrieved 2pm, Tue 6 Oct 2026 · Generated 10 Oct 2026, 9:55pm · Sample data · Made with Python (python-pptx)</a:t>
             </a:r>
           </a:p>
         </p:txBody>
@@ -6055,7 +6055,7 @@
                 </a:solidFill>
                 <a:latin typeface="Roboto"/>
               </a:rPr>
-              <a:t>Data retrieved 2pm, Tue 6 Oct 2026 · Generated 8 Oct 2026, 11:41pm · Sample data · Made with Python (python-pptx)</a:t>
+              <a:t>Data retrieved 2pm, Tue 6 Oct 2026 · Generated 10 Oct 2026, 9:55pm · Sample data · Made with Python (python-pptx)</a:t>
             </a:r>
           </a:p>
         </p:txBody>
@@ -6675,7 +6675,7 @@
                 </a:solidFill>
                 <a:latin typeface="Roboto"/>
               </a:rPr>
-              <a:t>Data retrieved 2pm, Tue 6 Oct 2026 · Generated 8 Oct 2026, 11:41pm · Sample data · Made with Python (python-pptx)</a:t>
+              <a:t>Data retrieved 2pm, Tue 6 Oct 2026 · Generated 10 Oct 2026, 9:55pm · Sample data · Made with Python (python-pptx)</a:t>
             </a:r>
           </a:p>
         </p:txBody>
